--- a/curriculum/unit-3-endpoints-deps-scale/module-3-1-every-endpoint-baselined.pptx
+++ b/curriculum/unit-3-endpoints-deps-scale/module-3-1-every-endpoint-baselined.pptx
@@ -1769,7 +1769,7 @@
                 <a:ea typeface="Segoe UI" pitchFamily="34" charset="-122"/>
                 <a:cs typeface="Segoe UI" pitchFamily="34" charset="-120"/>
               </a:rPr>
-              <a:t>In Classic, you picked a handful of endpoints per service and marked them </a:t>
+              <a:t>Under SDv1, you picked a handful of endpoints per service and marked them </a:t>
             </a:r>
             <a:pPr indent="0" marL="0">
               <a:buNone/>
@@ -1900,7 +1900,7 @@
                 <a:ea typeface="Segoe UI" pitchFamily="34" charset="-122"/>
                 <a:cs typeface="Segoe UI" pitchFamily="34" charset="-120"/>
               </a:rPr>
-              <a:t>&gt; *What happens in Latest when you don't configure key requests?*</a:t>
+              <a:t>&gt; *What happens with SDv2 when you don't configure key requests?*</a:t>
             </a:r>
             <a:endParaRPr lang="en-US" sz="2000" dirty="0"/>
           </a:p>
